--- a/ゲーム科1年/00_前期/ゲームプログラミングⅢ/01_スクロール.pptx
+++ b/ゲーム科1年/00_前期/ゲームプログラミングⅢ/01_スクロール.pptx
@@ -273,7 +273,7 @@
           <a:p>
             <a:fld id="{E9CC885B-4903-4D54-9A93-00025F12DED9}" type="datetimeFigureOut">
               <a:rPr kumimoji="1" lang="ja-JP" altLang="en-US" smtClean="0"/>
-              <a:t>2024/12/4</a:t>
+              <a:t>2026/6/22</a:t>
             </a:fld>
             <a:endParaRPr kumimoji="1" lang="ja-JP" altLang="en-US"/>
           </a:p>
@@ -503,7 +503,7 @@
           <a:p>
             <a:fld id="{E9CC885B-4903-4D54-9A93-00025F12DED9}" type="datetimeFigureOut">
               <a:rPr kumimoji="1" lang="ja-JP" altLang="en-US" smtClean="0"/>
-              <a:t>2024/12/4</a:t>
+              <a:t>2026/6/22</a:t>
             </a:fld>
             <a:endParaRPr kumimoji="1" lang="ja-JP" altLang="en-US"/>
           </a:p>
@@ -743,7 +743,7 @@
           <a:p>
             <a:fld id="{E9CC885B-4903-4D54-9A93-00025F12DED9}" type="datetimeFigureOut">
               <a:rPr kumimoji="1" lang="ja-JP" altLang="en-US" smtClean="0"/>
-              <a:t>2024/12/4</a:t>
+              <a:t>2026/6/22</a:t>
             </a:fld>
             <a:endParaRPr kumimoji="1" lang="ja-JP" altLang="en-US"/>
           </a:p>
@@ -973,7 +973,7 @@
           <a:p>
             <a:fld id="{E9CC885B-4903-4D54-9A93-00025F12DED9}" type="datetimeFigureOut">
               <a:rPr kumimoji="1" lang="ja-JP" altLang="en-US" smtClean="0"/>
-              <a:t>2024/12/4</a:t>
+              <a:t>2026/6/22</a:t>
             </a:fld>
             <a:endParaRPr kumimoji="1" lang="ja-JP" altLang="en-US"/>
           </a:p>
@@ -1248,7 +1248,7 @@
           <a:p>
             <a:fld id="{E9CC885B-4903-4D54-9A93-00025F12DED9}" type="datetimeFigureOut">
               <a:rPr kumimoji="1" lang="ja-JP" altLang="en-US" smtClean="0"/>
-              <a:t>2024/12/4</a:t>
+              <a:t>2026/6/22</a:t>
             </a:fld>
             <a:endParaRPr kumimoji="1" lang="ja-JP" altLang="en-US"/>
           </a:p>
@@ -1577,7 +1577,7 @@
           <a:p>
             <a:fld id="{E9CC885B-4903-4D54-9A93-00025F12DED9}" type="datetimeFigureOut">
               <a:rPr kumimoji="1" lang="ja-JP" altLang="en-US" smtClean="0"/>
-              <a:t>2024/12/4</a:t>
+              <a:t>2026/6/22</a:t>
             </a:fld>
             <a:endParaRPr kumimoji="1" lang="ja-JP" altLang="en-US"/>
           </a:p>
@@ -2053,7 +2053,7 @@
           <a:p>
             <a:fld id="{E9CC885B-4903-4D54-9A93-00025F12DED9}" type="datetimeFigureOut">
               <a:rPr kumimoji="1" lang="ja-JP" altLang="en-US" smtClean="0"/>
-              <a:t>2024/12/4</a:t>
+              <a:t>2026/6/22</a:t>
             </a:fld>
             <a:endParaRPr kumimoji="1" lang="ja-JP" altLang="en-US"/>
           </a:p>
@@ -2194,7 +2194,7 @@
           <a:p>
             <a:fld id="{E9CC885B-4903-4D54-9A93-00025F12DED9}" type="datetimeFigureOut">
               <a:rPr kumimoji="1" lang="ja-JP" altLang="en-US" smtClean="0"/>
-              <a:t>2024/12/4</a:t>
+              <a:t>2026/6/22</a:t>
             </a:fld>
             <a:endParaRPr kumimoji="1" lang="ja-JP" altLang="en-US"/>
           </a:p>
@@ -2307,7 +2307,7 @@
           <a:p>
             <a:fld id="{E9CC885B-4903-4D54-9A93-00025F12DED9}" type="datetimeFigureOut">
               <a:rPr kumimoji="1" lang="ja-JP" altLang="en-US" smtClean="0"/>
-              <a:t>2024/12/4</a:t>
+              <a:t>2026/6/22</a:t>
             </a:fld>
             <a:endParaRPr kumimoji="1" lang="ja-JP" altLang="en-US"/>
           </a:p>
@@ -2650,7 +2650,7 @@
           <a:p>
             <a:fld id="{E9CC885B-4903-4D54-9A93-00025F12DED9}" type="datetimeFigureOut">
               <a:rPr kumimoji="1" lang="ja-JP" altLang="en-US" smtClean="0"/>
-              <a:t>2024/12/4</a:t>
+              <a:t>2026/6/22</a:t>
             </a:fld>
             <a:endParaRPr kumimoji="1" lang="ja-JP" altLang="en-US"/>
           </a:p>
@@ -2938,7 +2938,7 @@
           <a:p>
             <a:fld id="{E9CC885B-4903-4D54-9A93-00025F12DED9}" type="datetimeFigureOut">
               <a:rPr kumimoji="1" lang="ja-JP" altLang="en-US" smtClean="0"/>
-              <a:t>2024/12/4</a:t>
+              <a:t>2026/6/22</a:t>
             </a:fld>
             <a:endParaRPr kumimoji="1" lang="ja-JP" altLang="en-US"/>
           </a:p>
@@ -3211,7 +3211,7 @@
           <a:p>
             <a:fld id="{E9CC885B-4903-4D54-9A93-00025F12DED9}" type="datetimeFigureOut">
               <a:rPr kumimoji="1" lang="ja-JP" altLang="en-US" smtClean="0"/>
-              <a:t>2024/12/4</a:t>
+              <a:t>2026/6/22</a:t>
             </a:fld>
             <a:endParaRPr kumimoji="1" lang="ja-JP" altLang="en-US"/>
           </a:p>
@@ -8111,7 +8111,7 @@
         <p:spPr>
           <a:xfrm>
             <a:off x="567542" y="1216429"/>
-            <a:ext cx="10649069" cy="1200329"/>
+            <a:ext cx="10649069" cy="830997"/>
           </a:xfrm>
           <a:prstGeom prst="rect">
             <a:avLst/>
@@ -8160,21 +8160,6 @@
               <a:t>スクロールは実現します。</a:t>
             </a:r>
             <a:endParaRPr lang="en-US" altLang="ja-JP" sz="2400" dirty="0"/>
-          </a:p>
-          <a:p>
-            <a:r>
-              <a:rPr kumimoji="1" lang="ja-JP" altLang="en-US" sz="2400" dirty="0"/>
-              <a:t>（</a:t>
-            </a:r>
-            <a:r>
-              <a:rPr kumimoji="1" lang="en-US" altLang="ja-JP" sz="2400" dirty="0"/>
-              <a:t>2D</a:t>
-            </a:r>
-            <a:r>
-              <a:rPr kumimoji="1" lang="ja-JP" altLang="en-US" sz="2400" dirty="0"/>
-              <a:t>の場合、疑似的にこのような仕組みを実現していきます）</a:t>
-            </a:r>
-            <a:endParaRPr kumimoji="1" lang="en-US" altLang="ja-JP" sz="2400" dirty="0"/>
           </a:p>
         </p:txBody>
       </p:sp>
